--- a/it/slides/06-Architettura_dei_Calcolatori-Rappresentazione_dei_Numeri_Reali-Lab.pptx
+++ b/it/slides/06-Architettura_dei_Calcolatori-Rappresentazione_dei_Numeri_Reali-Lab.pptx
@@ -120,35 +120,35 @@
   <p:extLst>
     <p:ext uri="{521415D9-36F7-43E2-AB2F-B90AF26B5E84}">
       <p14:sectionLst xmlns:p14="http://schemas.microsoft.com/office/powerpoint/2010/main">
-        <p14:section name="Apertura" id="{65e8f7a7-acfa-904e-2d3e-62a1b7f9dc3a}">
+        <p14:section name="Apertura" id="{f0b15017-48b0-030f-35fe-c92079b4ea44}">
           <p14:sldIdLst>
             <p14:sldId id="256"/>
             <p14:sldId id="257"/>
           </p14:sldIdLst>
         </p14:section>
-        <p14:section name="Riscaldamento sulla macchina" id="{f1385815-7312-2f2c-2333-d3067079ce3a}">
+        <p14:section name="Riscaldamento sulla macchina" id="{5fca471d-a560-71d6-be34-0a462a37cea6}">
           <p14:sldIdLst>
             <p14:sldId id="258"/>
           </p14:sldIdLst>
         </p14:section>
-        <p14:section name="Virgola fissa" id="{ad12ac6b-5dd0-45ae-bf48-7ee1b8e4e621}">
+        <p14:section name="Virgola fissa" id="{dd6c6a6e-95ac-513a-2874-07be6df3f7c1}">
           <p14:sldIdLst>
             <p14:sldId id="259"/>
           </p14:sldIdLst>
         </p14:section>
-        <p14:section name="Virgola mobile" id="{ace3d54e-ddda-0f0d-cb53-09576a46076a}">
+        <p14:section name="Virgola mobile" id="{28b9a78d-fef3-cc8c-9da7-adc5389cb8a3}">
           <p14:sldIdLst>
             <p14:sldId id="260"/>
           </p14:sldIdLst>
         </p14:section>
-        <p14:section name="Il programma completo" id="{eca26f4d-ca72-e8b8-f3a0-c324276c23e9}">
+        <p14:section name="Il programma completo" id="{6e33f4ea-325a-1878-da64-24a519ab36ef}">
           <p14:sldIdLst>
             <p14:sldId id="261"/>
             <p14:sldId id="262"/>
             <p14:sldId id="263"/>
           </p14:sldIdLst>
         </p14:section>
-        <p14:section name="Eseguire e provare" id="{60c73935-b996-8b7e-b0d1-16f48b7e2e98}">
+        <p14:section name="Eseguire e provare" id="{af7d6bce-1039-e816-5c04-faa917cfe9a3}">
           <p14:sldIdLst>
             <p14:sldId id="264"/>
             <p14:sldId id="265"/>
@@ -157,7 +157,7 @@
             <p14:sldId id="268"/>
           </p14:sldIdLst>
         </p14:section>
-        <p14:section name="Esercizi" id="{eae61988-49e9-0004-6898-fca544ec5b58}">
+        <p14:section name="Esercizi" id="{1597d700-42e6-087f-ea51-2b5a4c7ea508}">
           <p14:sldIdLst>
             <p14:sldId id="269"/>
           </p14:sldIdLst>

--- a/it/slides/06-Architettura_dei_Calcolatori-Rappresentazione_dei_Numeri_Reali-Lab.pptx
+++ b/it/slides/06-Architettura_dei_Calcolatori-Rappresentazione_dei_Numeri_Reali-Lab.pptx
@@ -120,35 +120,35 @@
   <p:extLst>
     <p:ext uri="{521415D9-36F7-43E2-AB2F-B90AF26B5E84}">
       <p14:sectionLst xmlns:p14="http://schemas.microsoft.com/office/powerpoint/2010/main">
-        <p14:section name="Apertura" id="{f0b15017-48b0-030f-35fe-c92079b4ea44}">
+        <p14:section name="Apertura" id="{235020a8-e101-43b3-47bc-5ca9820cb68c}">
           <p14:sldIdLst>
             <p14:sldId id="256"/>
             <p14:sldId id="257"/>
           </p14:sldIdLst>
         </p14:section>
-        <p14:section name="Riscaldamento sulla macchina" id="{5fca471d-a560-71d6-be34-0a462a37cea6}">
+        <p14:section name="Riscaldamento sulla macchina" id="{4743bbe2-e84d-d975-d0f3-8f5f0e20b19c}">
           <p14:sldIdLst>
             <p14:sldId id="258"/>
           </p14:sldIdLst>
         </p14:section>
-        <p14:section name="Virgola fissa" id="{dd6c6a6e-95ac-513a-2874-07be6df3f7c1}">
+        <p14:section name="Virgola fissa" id="{20f88146-7ef6-d31e-af96-f07519204305}">
           <p14:sldIdLst>
             <p14:sldId id="259"/>
           </p14:sldIdLst>
         </p14:section>
-        <p14:section name="Virgola mobile" id="{28b9a78d-fef3-cc8c-9da7-adc5389cb8a3}">
+        <p14:section name="Virgola mobile" id="{43350f12-9b27-6b07-d993-50baa1e4826e}">
           <p14:sldIdLst>
             <p14:sldId id="260"/>
           </p14:sldIdLst>
         </p14:section>
-        <p14:section name="Il programma completo" id="{6e33f4ea-325a-1878-da64-24a519ab36ef}">
+        <p14:section name="Il programma completo" id="{03e98c5c-e753-d6a5-74ec-b41499b064fe}">
           <p14:sldIdLst>
             <p14:sldId id="261"/>
             <p14:sldId id="262"/>
             <p14:sldId id="263"/>
           </p14:sldIdLst>
         </p14:section>
-        <p14:section name="Eseguire e provare" id="{af7d6bce-1039-e816-5c04-faa917cfe9a3}">
+        <p14:section name="Eseguire e provare" id="{24bf99e9-22bd-7b64-1252-4e52c8265eca}">
           <p14:sldIdLst>
             <p14:sldId id="264"/>
             <p14:sldId id="265"/>
@@ -157,7 +157,7 @@
             <p14:sldId id="268"/>
           </p14:sldIdLst>
         </p14:section>
-        <p14:section name="Esercizi" id="{1597d700-42e6-087f-ea51-2b5a4c7ea508}">
+        <p14:section name="Esercizi" id="{4df13e1b-625f-00ef-e408-3983600c5442}">
           <p14:sldIdLst>
             <p14:sldId id="269"/>
           </p14:sldIdLst>
@@ -568,7 +568,8 @@
               <a:rPr lang="en-US" dirty="0"/>
               <a:t>Questa è la presentazione del codice della Lezione 06. Mentre la presentazione della lezione sviluppa i concetti, questa raccoglie tutto ciò che si scrive e si esegue: ogni listato con il suo commento, il programma completo della lezione, il risultato che deve produrre, e la procedura per provarlo su ciascuno dei tre host. Le due presentazioni vanno lette insieme: i concetti spiegano il codice, e il codice dà ai concetti una conseguenza osservabile.
 Stato di apprendimento: DA COMPRENDERE OGGI, alla fine di questa lezione lo spiegate, lo seguite passo passo e lo applicate da soli; DA UTILIZZARE OGGI, oggi seguite e usate la ricetta; come funziona dentro si spiega più avanti, o non fa parte del corso; DA COMPRENDERE PIÙ AVANTI, riconoscete il nome e lo scopo; lo spiega una lezione successiva. Una slide senza etichetta è contesto: una storia, un esempio, una domanda, un esercizio.
-Stato di apprendimento di questa lezione. DA COMPRENDERE OGGI: la virgola fissa; complemento a uno ed eccesso k; la virgola mobile IEEE 754; il nome RV32IMAC. DA UTILIZZARE OGGI: il programma completo, gli strumenti di PRG32 (si usa, non si studia, in questo corso). DA COMPRENDERE PIÙ AVANTI: niente. Una slide senza etichetta è contesto: una storia, un esempio, una domanda, un esercizio.</a:t>
+Stato di apprendimento di questa lezione. DA COMPRENDERE OGGI: la virgola fissa; complemento a uno ed eccesso k; la virgola mobile IEEE 754; il nome RV32IMAC. DA UTILIZZARE OGGI: il programma completo, gli strumenti di PRG32 (si usa, non si studia, in questo corso). DA COMPRENDERE PIÙ AVANTI: niente. Una slide senza etichetta è contesto: una storia, un esempio, una domanda, un esercizio.
+Percorso. I risultati di oggi: (1) rappresentare un numero reale in virgola fissa e calcolarci con le istruzioni intere; (2) decodificare un numero IEEE 754 in precisione singola; (3) leggere il nome RV32IMAC e dire che cosa il kit sa e non sa calcolare in hardware. Si appoggia su: solo ciò che ha preparato la Lezione 01. Prossimo passo: Lezione 07, Verm1, parte 1: una testa che attraversa il mondo.</a:t>
             </a:r>
             <a:endParaRPr lang="en-US" dirty="0"/>
           </a:p>
